--- a/doc/Demo.pptx
+++ b/doc/Demo.pptx
@@ -272,7 +272,7 @@
       <p15:sldGuideLst xmlns:p15="http://schemas.microsoft.com/office/powerpoint/2012/main"/>
     </p:ext>
     <p:ext uri="GoogleSlidesCustomDataVersion2">
-      <go:slidesCustomData xmlns="" xmlns:mc="http://schemas.openxmlformats.org/markup-compatibility/2006" xmlns:mv="urn:schemas-microsoft-com:mac:vml" xmlns:c="http://schemas.openxmlformats.org/drawingml/2006/chart" xmlns:dgm="http://schemas.openxmlformats.org/drawingml/2006/diagram" xmlns:o="urn:schemas-microsoft-com:office:office" xmlns:v="urn:schemas-microsoft-com:vml" xmlns:pvml="urn:schemas-microsoft-com:office:powerpoint" xmlns:com="http://schemas.openxmlformats.org/drawingml/2006/compatibility" xmlns:p14="http://schemas.microsoft.com/office/powerpoint/2010/main" xmlns:p15="http://schemas.microsoft.com/office/powerpoint/2012/main" xmlns:ahyp="http://schemas.microsoft.com/office/drawing/2018/hyperlinkcolor" xmlns:go="http://customooxmlschemas.google.com/" r:id="rId22" roundtripDataSignature="AMtx7mhGC85oCclt4oNua0KaAtUiF01/rQ=="/>
+      <go:slidesCustomData xmlns:go="http://customooxmlschemas.google.com/" xmlns:ahyp="http://schemas.microsoft.com/office/drawing/2018/hyperlinkcolor" xmlns:p15="http://schemas.microsoft.com/office/powerpoint/2012/main" xmlns:p14="http://schemas.microsoft.com/office/powerpoint/2010/main" xmlns:com="http://schemas.openxmlformats.org/drawingml/2006/compatibility" xmlns:pvml="urn:schemas-microsoft-com:office:powerpoint" xmlns:v="urn:schemas-microsoft-com:vml" xmlns:o="urn:schemas-microsoft-com:office:office" xmlns:dgm="http://schemas.openxmlformats.org/drawingml/2006/diagram" xmlns:c="http://schemas.openxmlformats.org/drawingml/2006/chart" xmlns:mv="urn:schemas-microsoft-com:mac:vml" xmlns:mc="http://schemas.openxmlformats.org/markup-compatibility/2006" xmlns="" r:id="rId22" roundtripDataSignature="AMtx7mhGC85oCclt4oNua0KaAtUiF01/rQ=="/>
     </p:ext>
   </p:extLst>
 </p:presentation>
@@ -13000,7 +13000,7 @@
               <a:buNone/>
             </a:pPr>
             <a:r>
-              <a:rPr lang="en-US" sz="800">
+              <a:rPr lang="en-US" sz="800" dirty="0">
                 <a:solidFill>
                   <a:schemeClr val="lt1"/>
                 </a:solidFill>
@@ -13009,9 +13009,9 @@
                 <a:cs typeface="Calibri"/>
                 <a:sym typeface="Calibri"/>
               </a:rPr>
-              <a:t>vg-bench</a:t>
+              <a:t>bench</a:t>
             </a:r>
-            <a:endParaRPr/>
+            <a:endParaRPr dirty="0"/>
           </a:p>
         </p:txBody>
       </p:sp>
